--- a/presentations/PR_L10_RecordsOffice_Lesson.pptx
+++ b/presentations/PR_L10_RecordsOffice_Lesson.pptx
@@ -2617,7 +2617,7 @@
                 <a:ea typeface="IBM Plex Sans" pitchFamily="34" charset="-122"/>
                 <a:cs typeface="IBM Plex Sans" pitchFamily="34" charset="-120"/>
               </a:rPr>
-              <a:t>Mistake: looping over a file you have already closed, or reading and writing one file at once.</a:t>
+              <a:t>Common mistake: looping over a file you have already closed, or reading and writing one file at once.</a:t>
             </a:r>
             <a:endParaRPr lang="en-US" sz="1700" dirty="0"/>
           </a:p>
@@ -7839,7 +7839,7 @@
                 <a:ea typeface="IBM Plex Sans" pitchFamily="34" charset="-122"/>
                 <a:cs typeface="IBM Plex Sans" pitchFamily="34" charset="-120"/>
               </a:rPr>
-              <a:t>Mistake: opening a file that is not there, which stops the program with an error.</a:t>
+              <a:t>Common mistake: opening a file that is not there, which stops the program with an error.</a:t>
             </a:r>
             <a:endParaRPr lang="en-US" sz="1700" dirty="0"/>
           </a:p>
@@ -8415,7 +8415,7 @@
                 <a:ea typeface="IBM Plex Sans" pitchFamily="34" charset="-122"/>
                 <a:cs typeface="IBM Plex Sans" pitchFamily="34" charset="-120"/>
               </a:rPr>
-              <a:t>Mistake: measuring a line before stripping it, which counts the newline as a character.</a:t>
+              <a:t>Common mistake: measuring a line before stripping it, which counts the newline as a character.</a:t>
             </a:r>
             <a:endParaRPr lang="en-US" sz="1700" dirty="0"/>
           </a:p>
@@ -8991,7 +8991,7 @@
                 <a:ea typeface="IBM Plex Sans" pitchFamily="34" charset="-122"/>
                 <a:cs typeface="IBM Plex Sans" pitchFamily="34" charset="-120"/>
               </a:rPr>
-              <a:t>Mistake: using write mode on a file you meant to add to, which wipes it completely.</a:t>
+              <a:t>Common mistake: using write mode on a file you meant to add to, which wipes it completely.</a:t>
             </a:r>
             <a:endParaRPr lang="en-US" sz="1700" dirty="0"/>
           </a:p>
@@ -9567,7 +9567,7 @@
                 <a:ea typeface="IBM Plex Sans" pitchFamily="34" charset="-122"/>
                 <a:cs typeface="IBM Plex Sans" pitchFamily="34" charset="-120"/>
               </a:rPr>
-              <a:t>Mistake: leaving the newline out, so the new entry runs straight into the last one.</a:t>
+              <a:t>Common mistake: leaving the newline out, so the new entry runs straight into the last one.</a:t>
             </a:r>
             <a:endParaRPr lang="en-US" sz="1700" dirty="0"/>
           </a:p>
@@ -10143,7 +10143,7 @@
                 <a:ea typeface="IBM Plex Sans" pitchFamily="34" charset="-122"/>
                 <a:cs typeface="IBM Plex Sans" pitchFamily="34" charset="-120"/>
               </a:rPr>
-              <a:t>Mistake: splitting before stripping, which leaves a newline stuck on the last field.</a:t>
+              <a:t>Common mistake: splitting before stripping, which leaves a newline stuck on the last field.</a:t>
             </a:r>
             <a:endParaRPr lang="en-US" sz="1700" dirty="0"/>
           </a:p>
